--- a/scripts/ops/fixtures/tier0/pptx.pptx
+++ b/scripts/ops/fixtures/tier0/pptx.pptx
@@ -3632,7 +3632,7 @@
       </p:graphicFrame>
       <p:pic>
         <p:nvPicPr>
-          <p:cNvPr id="4" name="Picture 3" descr="facade-451.jpg"/>
+          <p:cNvPr id="4" name="Picture 3" descr="facade-436.jpg"/>
           <p:cNvPicPr>
             <a:picLocks noChangeAspect="1"/>
           </p:cNvPicPr>
@@ -4215,7 +4215,7 @@
       </p:graphicFrame>
       <p:pic>
         <p:nvPicPr>
-          <p:cNvPr id="4" name="Picture 3" descr="facade-452.jpg"/>
+          <p:cNvPr id="4" name="Picture 3" descr="facade-437.jpg"/>
           <p:cNvPicPr>
             <a:picLocks noChangeAspect="1"/>
           </p:cNvPicPr>
